--- a/decks/hist-williams-control/hist-williams-control_ch2_williams-problems.pptx
+++ b/decks/hist-williams-control/hist-williams-control_ch2_williams-problems.pptx
@@ -126,30 +126,30 @@
   <p:extLst>
     <p:ext uri="{521415D9-36F7-43E2-AB2F-B90AF26B5E84}">
       <p14:sectionLst xmlns:p14="http://schemas.microsoft.com/office/powerpoint/2010/main">
-        <p14:section name="Opening" id="{8dea898b-e49f-fb5b-bbf9-e1e57dbf8e11}">
+        <p14:section name="Opening" id="{bf0887de-fc6c-667d-a3c3-5324c4732cda}">
           <p14:sldIdLst>
             <p14:sldId id="256"/>
           </p14:sldIdLst>
         </p14:section>
-        <p14:section name="Gate" id="{f2df7215-784b-725c-d692-2cb836a012fd}">
+        <p14:section name="Gate" id="{6a7d1a9a-6606-0e6d-2ecc-6f75b01919ca}">
           <p14:sldIdLst>
             <p14:sldId id="257"/>
             <p14:sldId id="258"/>
           </p14:sldIdLst>
         </p14:section>
-        <p14:section name="Pre-teach" id="{17f5f32c-948d-b1c2-e226-ed0e810bac5c}">
+        <p14:section name="Pre-teach" id="{80770002-1783-1f09-42ab-2a9892a792d1}">
           <p14:sldIdLst>
             <p14:sldId id="259"/>
             <p14:sldId id="260"/>
           </p14:sldIdLst>
         </p14:section>
-        <p14:section name="Read-along" id="{6ae756c8-9e3a-8404-a3b5-b8579251fec3}">
+        <p14:section name="Read-along" id="{5995ccea-2afd-0a51-ecb1-eea30e6dfa54}">
           <p14:sldIdLst>
             <p14:sldId id="261"/>
             <p14:sldId id="262"/>
           </p14:sldIdLst>
         </p14:section>
-        <p14:section name="Teach" id="{74cfbbb0-0ec5-bd13-c184-e4400cdbb8b9}">
+        <p14:section name="Teach" id="{5a51530e-05c7-c094-5d73-4e76563f9cca}">
           <p14:sldIdLst>
             <p14:sldId id="263"/>
             <p14:sldId id="264"/>
@@ -158,7 +158,7 @@
             <p14:sldId id="267"/>
           </p14:sldIdLst>
         </p14:section>
-        <p14:section name="Routes" id="{f581756a-8153-92ab-286f-815405683dad}">
+        <p14:section name="Routes" id="{80091d1c-d814-0dad-81f1-f6bddbbc07d8}">
           <p14:sldIdLst>
             <p14:sldId id="268"/>
             <p14:sldId id="269"/>
@@ -166,12 +166,12 @@
             <p14:sldId id="271"/>
           </p14:sldIdLst>
         </p14:section>
-        <p14:section name="Close" id="{b676aada-e5b3-e5ee-994a-2208a49a45b0}">
+        <p14:section name="Close" id="{02bdd39b-72c5-e452-3fcc-c04c31ac4873}">
           <p14:sldIdLst>
             <p14:sldId id="272"/>
           </p14:sldIdLst>
         </p14:section>
-        <p14:section name="Answers" id="{ae9eb069-3d70-1c5e-9c5b-8370c2b49ce2}">
+        <p14:section name="Answers" id="{c200a2b6-2ac2-6777-5ac5-8be8b85f72fa}">
           <p14:sldIdLst>
             <p14:sldId id="273"/>
             <p14:sldId id="274"/>
@@ -2259,7 +2259,7 @@
             <a:r>
               <a:rPr lang="en-US" dirty="0"/>
               <a:t>Teach — The morning after Hastings. Say it in your own words, then check understanding with a quick question: ask a pupil from the pre-teach group first, since they met these words and ideas before the lesson. Pupils try to recall before you re-explain.
-On 14 October 1066 the English army led by King Harold fought William's Norman army from sunrise to nearly sunset. William, Duke of Normandy, defeated and killed Harold. Harold's brothers Gyrth and Leofwine, two important Anglo-Saxon earls, were killed as well. In one day the Godwinson family, the most powerful in England, had lost three of its leaders.
+On 14 October 1066 King Harold's English army and the Norman army of William, Duke of Normandy, fought each other from first light until almost dark. By the end of it Harold was dead and William had won. Harold's brothers Gyrth and Leofwine, two important Anglo-Saxon earls, were killed as well. In one day the Godwinson family, the most powerful in England, had lost three of its leaders.
 William expected England to submit to him and offer him the crown. It did not happen. The surviving Anglo-Saxon earls did not come to William and accept him as their new king. He had won a battle, but he had not won the country.
 This is the point your topic picks up from. Winning at Hastings gave William a chance; the next ten weeks decided whether he could use it.
 Tip: Battle of Hastings, 14 October 1066; coronation, Christmas Day 1066. Two dates, one autumn. Learn them as a pair.</a:t>
@@ -16288,7 +16288,7 @@
                 <a:ea typeface="Calibri" pitchFamily="34" charset="-122"/>
                 <a:cs typeface="Calibri" pitchFamily="34" charset="-120"/>
               </a:rPr>
-              <a:t>On 14 October 1066 the English army led by King Harold fought William's Norman army from sunrise to nearly sunset.</a:t>
+              <a:t>On 14 October 1066 King Harold's English army and the Norman army of William, Duke of Normandy, fought each other from first light until almost dark.</a:t>
             </a:r>
             <a:endParaRPr lang="en-US" sz="2200" dirty="0"/>
           </a:p>
